--- a/docs/presentation/Conflict_Trade_Explorer_final.pptx
+++ b/docs/presentation/Conflict_Trade_Explorer_final.pptx
@@ -3582,7 +3582,15 @@
                   <a:srgbClr val="E8EDF2"/>
                 </a:solidFill>
               </a:rPr>
-              <a:t>Visual encoding clarity · Navigation intuitiveness · Missing data transparency</a:t>
+              <a:t>Visual encoding clarity · </a:t>
+            </a:r>
+            <a:r>
+              <a:rPr lang="en-US" sz="1200">
+                <a:solidFill>
+                  <a:srgbClr val="E8EDF2"/>
+                </a:solidFill>
+              </a:rPr>
+              <a:t>Navigation intuitiveness</a:t>
             </a:r>
             <a:endParaRPr lang="en-US" sz="1200" dirty="0"/>
           </a:p>
